--- a/docs/pptx/auc3/ritu-auc3-linsubhr-ratio-hosp7.pptx
+++ b/docs/pptx/auc3/ritu-auc3-linsubhr-ratio-hosp7.pptx
@@ -2443,7 +2443,7 @@
           </p:nvSpPr>
           <p:spPr>
             <a:xfrm>
-              <a:off x="1463479" y="2073503"/>
+              <a:off x="1464298" y="2073503"/>
               <a:ext cx="0" cy="3649639"/>
             </a:xfrm>
             <a:custGeom>
@@ -2486,7 +2486,7 @@
           </p:nvSpPr>
           <p:spPr>
             <a:xfrm>
-              <a:off x="3267849" y="2073503"/>
+              <a:off x="3268188" y="2073503"/>
               <a:ext cx="0" cy="3649639"/>
             </a:xfrm>
             <a:custGeom>
@@ -2529,7 +2529,7 @@
           </p:nvSpPr>
           <p:spPr>
             <a:xfrm>
-              <a:off x="5072218" y="2073503"/>
+              <a:off x="5072078" y="2073503"/>
               <a:ext cx="0" cy="3649639"/>
             </a:xfrm>
             <a:custGeom>
@@ -2572,7 +2572,7 @@
           </p:nvSpPr>
           <p:spPr>
             <a:xfrm>
-              <a:off x="6876587" y="2073503"/>
+              <a:off x="6875967" y="2073503"/>
               <a:ext cx="0" cy="3649639"/>
             </a:xfrm>
             <a:custGeom>
@@ -2830,7 +2830,7 @@
           </p:nvSpPr>
           <p:spPr>
             <a:xfrm>
-              <a:off x="2365664" y="2073503"/>
+              <a:off x="2366243" y="2073503"/>
               <a:ext cx="0" cy="3649639"/>
             </a:xfrm>
             <a:custGeom>
@@ -2873,7 +2873,7 @@
           </p:nvSpPr>
           <p:spPr>
             <a:xfrm>
-              <a:off x="4170033" y="2073503"/>
+              <a:off x="4170133" y="2073503"/>
               <a:ext cx="0" cy="3649639"/>
             </a:xfrm>
             <a:custGeom>
@@ -2916,7 +2916,7 @@
           </p:nvSpPr>
           <p:spPr>
             <a:xfrm>
-              <a:off x="5974402" y="2073503"/>
+              <a:off x="5974022" y="2073503"/>
               <a:ext cx="0" cy="3649639"/>
             </a:xfrm>
             <a:custGeom>
@@ -2959,7 +2959,7 @@
           </p:nvSpPr>
           <p:spPr>
             <a:xfrm>
-              <a:off x="7778772" y="2073503"/>
+              <a:off x="7777912" y="2073503"/>
               <a:ext cx="0" cy="3649639"/>
             </a:xfrm>
             <a:custGeom>
@@ -3003,452 +3003,452 @@
           <p:spPr>
             <a:xfrm>
               <a:off x="1172049" y="2073503"/>
-              <a:ext cx="7090630" cy="3475554"/>
+              <a:ext cx="7090630" cy="3475515"/>
             </a:xfrm>
             <a:custGeom>
               <a:avLst/>
               <a:pathLst>
-                <a:path w="7090630" h="3475554">
+                <a:path w="7090630" h="3475515">
                   <a:moveTo>
-                    <a:pt x="1719316" y="0"/>
+                    <a:pt x="1725135" y="0"/>
                   </a:moveTo>
                   <a:lnTo>
-                    <a:pt x="1790563" y="268807"/>
-                  </a:lnTo>
-                  <a:lnTo>
-                    <a:pt x="1862185" y="518080"/>
-                  </a:lnTo>
-                  <a:lnTo>
-                    <a:pt x="1933808" y="748026"/>
-                  </a:lnTo>
-                  <a:lnTo>
-                    <a:pt x="2005430" y="960143"/>
-                  </a:lnTo>
-                  <a:lnTo>
-                    <a:pt x="2077053" y="1155814"/>
-                  </a:lnTo>
-                  <a:lnTo>
-                    <a:pt x="2148675" y="1336312"/>
-                  </a:lnTo>
-                  <a:lnTo>
-                    <a:pt x="2220298" y="1502816"/>
-                  </a:lnTo>
-                  <a:lnTo>
-                    <a:pt x="2291920" y="1656410"/>
-                  </a:lnTo>
-                  <a:lnTo>
-                    <a:pt x="2363543" y="1798094"/>
-                  </a:lnTo>
-                  <a:lnTo>
-                    <a:pt x="2435165" y="1928793"/>
-                  </a:lnTo>
-                  <a:lnTo>
-                    <a:pt x="2506788" y="2049358"/>
-                  </a:lnTo>
-                  <a:lnTo>
-                    <a:pt x="2578410" y="2160575"/>
-                  </a:lnTo>
-                  <a:lnTo>
-                    <a:pt x="2650033" y="2263168"/>
-                  </a:lnTo>
-                  <a:lnTo>
-                    <a:pt x="2721655" y="2357807"/>
-                  </a:lnTo>
-                  <a:lnTo>
-                    <a:pt x="2793278" y="2445108"/>
-                  </a:lnTo>
-                  <a:lnTo>
-                    <a:pt x="2864901" y="2525640"/>
-                  </a:lnTo>
-                  <a:lnTo>
-                    <a:pt x="2936523" y="2599928"/>
-                  </a:lnTo>
-                  <a:lnTo>
-                    <a:pt x="3008146" y="2644537"/>
-                  </a:lnTo>
-                  <a:lnTo>
-                    <a:pt x="3079768" y="2597354"/>
-                  </a:lnTo>
-                  <a:lnTo>
-                    <a:pt x="3151391" y="2547519"/>
-                  </a:lnTo>
-                  <a:lnTo>
-                    <a:pt x="3223013" y="2494881"/>
-                  </a:lnTo>
-                  <a:lnTo>
-                    <a:pt x="3294636" y="2439283"/>
-                  </a:lnTo>
-                  <a:lnTo>
-                    <a:pt x="3366258" y="2380560"/>
-                  </a:lnTo>
-                  <a:lnTo>
-                    <a:pt x="3437881" y="2318536"/>
-                  </a:lnTo>
-                  <a:lnTo>
-                    <a:pt x="3509503" y="2253024"/>
-                  </a:lnTo>
-                  <a:lnTo>
-                    <a:pt x="3581126" y="2183828"/>
-                  </a:lnTo>
-                  <a:lnTo>
-                    <a:pt x="3652748" y="2110743"/>
-                  </a:lnTo>
-                  <a:lnTo>
-                    <a:pt x="3724371" y="2033548"/>
-                  </a:lnTo>
-                  <a:lnTo>
-                    <a:pt x="3795993" y="1952013"/>
-                  </a:lnTo>
-                  <a:lnTo>
-                    <a:pt x="3867616" y="1865894"/>
-                  </a:lnTo>
-                  <a:lnTo>
-                    <a:pt x="3939238" y="1774933"/>
-                  </a:lnTo>
-                  <a:lnTo>
-                    <a:pt x="4010861" y="1678858"/>
-                  </a:lnTo>
-                  <a:lnTo>
-                    <a:pt x="4082483" y="1577381"/>
-                  </a:lnTo>
-                  <a:lnTo>
-                    <a:pt x="4154106" y="1470199"/>
-                  </a:lnTo>
-                  <a:lnTo>
-                    <a:pt x="4225729" y="1356991"/>
-                  </a:lnTo>
-                  <a:lnTo>
-                    <a:pt x="4297351" y="1237418"/>
-                  </a:lnTo>
-                  <a:lnTo>
-                    <a:pt x="4368974" y="1111122"/>
-                  </a:lnTo>
-                  <a:lnTo>
-                    <a:pt x="4440596" y="977726"/>
-                  </a:lnTo>
-                  <a:lnTo>
-                    <a:pt x="4512219" y="836829"/>
-                  </a:lnTo>
-                  <a:lnTo>
-                    <a:pt x="4583841" y="688011"/>
-                  </a:lnTo>
-                  <a:lnTo>
-                    <a:pt x="4655464" y="530825"/>
-                  </a:lnTo>
-                  <a:lnTo>
-                    <a:pt x="4727086" y="364802"/>
-                  </a:lnTo>
-                  <a:lnTo>
-                    <a:pt x="4798709" y="189445"/>
-                  </a:lnTo>
-                  <a:lnTo>
-                    <a:pt x="4870331" y="4229"/>
-                  </a:lnTo>
-                  <a:lnTo>
-                    <a:pt x="4871880" y="0"/>
+                    <a:pt x="1790563" y="248484"/>
+                  </a:lnTo>
+                  <a:lnTo>
+                    <a:pt x="1862185" y="499398"/>
+                  </a:lnTo>
+                  <a:lnTo>
+                    <a:pt x="1933808" y="730852"/>
+                  </a:lnTo>
+                  <a:lnTo>
+                    <a:pt x="2005430" y="944355"/>
+                  </a:lnTo>
+                  <a:lnTo>
+                    <a:pt x="2077053" y="1141300"/>
+                  </a:lnTo>
+                  <a:lnTo>
+                    <a:pt x="2148675" y="1322970"/>
+                  </a:lnTo>
+                  <a:lnTo>
+                    <a:pt x="2220298" y="1490551"/>
+                  </a:lnTo>
+                  <a:lnTo>
+                    <a:pt x="2291920" y="1645135"/>
+                  </a:lnTo>
+                  <a:lnTo>
+                    <a:pt x="2363543" y="1787730"/>
+                  </a:lnTo>
+                  <a:lnTo>
+                    <a:pt x="2435165" y="1919266"/>
+                  </a:lnTo>
+                  <a:lnTo>
+                    <a:pt x="2506788" y="2040601"/>
+                  </a:lnTo>
+                  <a:lnTo>
+                    <a:pt x="2578410" y="2152526"/>
+                  </a:lnTo>
+                  <a:lnTo>
+                    <a:pt x="2650033" y="2255770"/>
+                  </a:lnTo>
+                  <a:lnTo>
+                    <a:pt x="2721655" y="2351006"/>
+                  </a:lnTo>
+                  <a:lnTo>
+                    <a:pt x="2793278" y="2438857"/>
+                  </a:lnTo>
+                  <a:lnTo>
+                    <a:pt x="2864901" y="2519894"/>
+                  </a:lnTo>
+                  <a:lnTo>
+                    <a:pt x="2936523" y="2594647"/>
+                  </a:lnTo>
+                  <a:lnTo>
+                    <a:pt x="3008146" y="2647907"/>
+                  </a:lnTo>
+                  <a:lnTo>
+                    <a:pt x="3079768" y="2600900"/>
+                  </a:lnTo>
+                  <a:lnTo>
+                    <a:pt x="3151391" y="2551250"/>
+                  </a:lnTo>
+                  <a:lnTo>
+                    <a:pt x="3223013" y="2498808"/>
+                  </a:lnTo>
+                  <a:lnTo>
+                    <a:pt x="3294636" y="2443416"/>
+                  </a:lnTo>
+                  <a:lnTo>
+                    <a:pt x="3366258" y="2384909"/>
+                  </a:lnTo>
+                  <a:lnTo>
+                    <a:pt x="3437881" y="2323112"/>
+                  </a:lnTo>
+                  <a:lnTo>
+                    <a:pt x="3509503" y="2257839"/>
+                  </a:lnTo>
+                  <a:lnTo>
+                    <a:pt x="3581126" y="2188896"/>
+                  </a:lnTo>
+                  <a:lnTo>
+                    <a:pt x="3652748" y="2116075"/>
+                  </a:lnTo>
+                  <a:lnTo>
+                    <a:pt x="3724371" y="2039159"/>
+                  </a:lnTo>
+                  <a:lnTo>
+                    <a:pt x="3795993" y="1957918"/>
+                  </a:lnTo>
+                  <a:lnTo>
+                    <a:pt x="3867616" y="1872107"/>
+                  </a:lnTo>
+                  <a:lnTo>
+                    <a:pt x="3939238" y="1781471"/>
+                  </a:lnTo>
+                  <a:lnTo>
+                    <a:pt x="4010861" y="1685737"/>
+                  </a:lnTo>
+                  <a:lnTo>
+                    <a:pt x="4082483" y="1584619"/>
+                  </a:lnTo>
+                  <a:lnTo>
+                    <a:pt x="4154106" y="1477815"/>
+                  </a:lnTo>
+                  <a:lnTo>
+                    <a:pt x="4225729" y="1365004"/>
+                  </a:lnTo>
+                  <a:lnTo>
+                    <a:pt x="4297351" y="1245848"/>
+                  </a:lnTo>
+                  <a:lnTo>
+                    <a:pt x="4368974" y="1119992"/>
+                  </a:lnTo>
+                  <a:lnTo>
+                    <a:pt x="4440596" y="987057"/>
+                  </a:lnTo>
+                  <a:lnTo>
+                    <a:pt x="4512219" y="846647"/>
+                  </a:lnTo>
+                  <a:lnTo>
+                    <a:pt x="4583841" y="698340"/>
+                  </a:lnTo>
+                  <a:lnTo>
+                    <a:pt x="4655464" y="541692"/>
+                  </a:lnTo>
+                  <a:lnTo>
+                    <a:pt x="4727086" y="376235"/>
+                  </a:lnTo>
+                  <a:lnTo>
+                    <a:pt x="4798709" y="201472"/>
+                  </a:lnTo>
+                  <a:lnTo>
+                    <a:pt x="4870331" y="16881"/>
+                  </a:lnTo>
+                  <a:lnTo>
+                    <a:pt x="4876533" y="0"/>
                   </a:lnTo>
                   <a:lnTo>
                     <a:pt x="7090630" y="0"/>
                   </a:lnTo>
                   <a:lnTo>
-                    <a:pt x="7090630" y="3475554"/>
-                  </a:lnTo>
-                  <a:lnTo>
-                    <a:pt x="7019007" y="3474865"/>
-                  </a:lnTo>
-                  <a:lnTo>
-                    <a:pt x="6947385" y="3474119"/>
-                  </a:lnTo>
-                  <a:lnTo>
-                    <a:pt x="6875762" y="3473309"/>
-                  </a:lnTo>
-                  <a:lnTo>
-                    <a:pt x="6804139" y="3472432"/>
-                  </a:lnTo>
-                  <a:lnTo>
-                    <a:pt x="6732517" y="3471481"/>
-                  </a:lnTo>
-                  <a:lnTo>
-                    <a:pt x="6660894" y="3470450"/>
-                  </a:lnTo>
-                  <a:lnTo>
-                    <a:pt x="6589272" y="3469332"/>
-                  </a:lnTo>
-                  <a:lnTo>
-                    <a:pt x="6517649" y="3468121"/>
-                  </a:lnTo>
-                  <a:lnTo>
-                    <a:pt x="6446027" y="3466808"/>
-                  </a:lnTo>
-                  <a:lnTo>
-                    <a:pt x="6374404" y="3465384"/>
-                  </a:lnTo>
-                  <a:lnTo>
-                    <a:pt x="6302782" y="3463840"/>
-                  </a:lnTo>
-                  <a:lnTo>
-                    <a:pt x="6231159" y="3462167"/>
-                  </a:lnTo>
-                  <a:lnTo>
-                    <a:pt x="6159537" y="3460353"/>
-                  </a:lnTo>
-                  <a:lnTo>
-                    <a:pt x="6087914" y="3458387"/>
-                  </a:lnTo>
-                  <a:lnTo>
-                    <a:pt x="6016292" y="3456256"/>
-                  </a:lnTo>
-                  <a:lnTo>
-                    <a:pt x="5944669" y="3453945"/>
-                  </a:lnTo>
-                  <a:lnTo>
-                    <a:pt x="5873047" y="3451440"/>
-                  </a:lnTo>
-                  <a:lnTo>
-                    <a:pt x="5801424" y="3448725"/>
-                  </a:lnTo>
-                  <a:lnTo>
-                    <a:pt x="5729802" y="3445781"/>
-                  </a:lnTo>
-                  <a:lnTo>
-                    <a:pt x="5658179" y="3442590"/>
-                  </a:lnTo>
-                  <a:lnTo>
-                    <a:pt x="5586557" y="3439130"/>
-                  </a:lnTo>
-                  <a:lnTo>
-                    <a:pt x="5514934" y="3435380"/>
-                  </a:lnTo>
-                  <a:lnTo>
-                    <a:pt x="5443311" y="3431315"/>
-                  </a:lnTo>
-                  <a:lnTo>
-                    <a:pt x="5371689" y="3426908"/>
-                  </a:lnTo>
-                  <a:lnTo>
-                    <a:pt x="5300066" y="3422130"/>
-                  </a:lnTo>
-                  <a:lnTo>
-                    <a:pt x="5228444" y="3416951"/>
-                  </a:lnTo>
-                  <a:lnTo>
-                    <a:pt x="5156821" y="3411337"/>
-                  </a:lnTo>
-                  <a:lnTo>
-                    <a:pt x="5085199" y="3405251"/>
-                  </a:lnTo>
-                  <a:lnTo>
-                    <a:pt x="5013576" y="3398653"/>
-                  </a:lnTo>
-                  <a:lnTo>
-                    <a:pt x="4941954" y="3391501"/>
-                  </a:lnTo>
-                  <a:lnTo>
-                    <a:pt x="4870331" y="3383747"/>
-                  </a:lnTo>
-                  <a:lnTo>
-                    <a:pt x="4798709" y="3375342"/>
-                  </a:lnTo>
-                  <a:lnTo>
-                    <a:pt x="4727086" y="3366230"/>
-                  </a:lnTo>
-                  <a:lnTo>
-                    <a:pt x="4655464" y="3356352"/>
-                  </a:lnTo>
-                  <a:lnTo>
-                    <a:pt x="4583841" y="3345645"/>
-                  </a:lnTo>
-                  <a:lnTo>
-                    <a:pt x="4512219" y="3334037"/>
-                  </a:lnTo>
-                  <a:lnTo>
-                    <a:pt x="4440596" y="3321453"/>
-                  </a:lnTo>
-                  <a:lnTo>
-                    <a:pt x="4368974" y="3307812"/>
-                  </a:lnTo>
-                  <a:lnTo>
-                    <a:pt x="4297351" y="3293024"/>
-                  </a:lnTo>
-                  <a:lnTo>
-                    <a:pt x="4225729" y="3276993"/>
-                  </a:lnTo>
-                  <a:lnTo>
-                    <a:pt x="4154106" y="3259615"/>
-                  </a:lnTo>
-                  <a:lnTo>
-                    <a:pt x="4082483" y="3240776"/>
-                  </a:lnTo>
-                  <a:lnTo>
-                    <a:pt x="4010861" y="3220353"/>
-                  </a:lnTo>
-                  <a:lnTo>
-                    <a:pt x="3939238" y="3198214"/>
-                  </a:lnTo>
-                  <a:lnTo>
-                    <a:pt x="3867616" y="3174215"/>
-                  </a:lnTo>
-                  <a:lnTo>
-                    <a:pt x="3795993" y="3148197"/>
-                  </a:lnTo>
-                  <a:lnTo>
-                    <a:pt x="3724371" y="3119993"/>
-                  </a:lnTo>
-                  <a:lnTo>
-                    <a:pt x="3652748" y="3089419"/>
-                  </a:lnTo>
-                  <a:lnTo>
-                    <a:pt x="3581126" y="3056274"/>
-                  </a:lnTo>
-                  <a:lnTo>
-                    <a:pt x="3509503" y="3020344"/>
-                  </a:lnTo>
-                  <a:lnTo>
-                    <a:pt x="3437881" y="2981393"/>
-                  </a:lnTo>
-                  <a:lnTo>
-                    <a:pt x="3366258" y="2939169"/>
-                  </a:lnTo>
-                  <a:lnTo>
-                    <a:pt x="3294636" y="2893396"/>
-                  </a:lnTo>
-                  <a:lnTo>
-                    <a:pt x="3223013" y="2843775"/>
-                  </a:lnTo>
-                  <a:lnTo>
-                    <a:pt x="3151391" y="2789983"/>
-                  </a:lnTo>
-                  <a:lnTo>
-                    <a:pt x="3079768" y="2731670"/>
-                  </a:lnTo>
-                  <a:lnTo>
-                    <a:pt x="3008146" y="2668456"/>
-                  </a:lnTo>
-                  <a:lnTo>
-                    <a:pt x="2936523" y="2689209"/>
-                  </a:lnTo>
-                  <a:lnTo>
-                    <a:pt x="2864901" y="2731503"/>
-                  </a:lnTo>
-                  <a:lnTo>
-                    <a:pt x="2793278" y="2771545"/>
-                  </a:lnTo>
-                  <a:lnTo>
-                    <a:pt x="2721655" y="2809456"/>
-                  </a:lnTo>
-                  <a:lnTo>
-                    <a:pt x="2650033" y="2845348"/>
-                  </a:lnTo>
-                  <a:lnTo>
-                    <a:pt x="2578410" y="2879331"/>
-                  </a:lnTo>
-                  <a:lnTo>
-                    <a:pt x="2506788" y="2911504"/>
-                  </a:lnTo>
-                  <a:lnTo>
-                    <a:pt x="2435165" y="2941965"/>
-                  </a:lnTo>
-                  <a:lnTo>
-                    <a:pt x="2363543" y="2970804"/>
-                  </a:lnTo>
-                  <a:lnTo>
-                    <a:pt x="2291920" y="2998108"/>
-                  </a:lnTo>
-                  <a:lnTo>
-                    <a:pt x="2220298" y="3023959"/>
-                  </a:lnTo>
-                  <a:lnTo>
-                    <a:pt x="2148675" y="3048434"/>
-                  </a:lnTo>
-                  <a:lnTo>
-                    <a:pt x="2077053" y="3071606"/>
-                  </a:lnTo>
-                  <a:lnTo>
-                    <a:pt x="2005430" y="3093544"/>
-                  </a:lnTo>
-                  <a:lnTo>
-                    <a:pt x="1933808" y="3114315"/>
-                  </a:lnTo>
-                  <a:lnTo>
-                    <a:pt x="1862185" y="3133980"/>
-                  </a:lnTo>
-                  <a:lnTo>
-                    <a:pt x="1790563" y="3152598"/>
-                  </a:lnTo>
-                  <a:lnTo>
-                    <a:pt x="1718940" y="3170225"/>
-                  </a:lnTo>
-                  <a:lnTo>
-                    <a:pt x="1647318" y="3186914"/>
-                  </a:lnTo>
-                  <a:lnTo>
-                    <a:pt x="1575695" y="3202715"/>
-                  </a:lnTo>
-                  <a:lnTo>
-                    <a:pt x="1504073" y="3217674"/>
-                  </a:lnTo>
-                  <a:lnTo>
-                    <a:pt x="1432450" y="3231837"/>
-                  </a:lnTo>
-                  <a:lnTo>
-                    <a:pt x="1360827" y="3245246"/>
-                  </a:lnTo>
-                  <a:lnTo>
-                    <a:pt x="1289205" y="3257942"/>
-                  </a:lnTo>
-                  <a:lnTo>
-                    <a:pt x="1217582" y="3269962"/>
-                  </a:lnTo>
-                  <a:lnTo>
-                    <a:pt x="1145960" y="3281341"/>
-                  </a:lnTo>
-                  <a:lnTo>
-                    <a:pt x="1074337" y="3292116"/>
-                  </a:lnTo>
-                  <a:lnTo>
-                    <a:pt x="1002715" y="3302316"/>
-                  </a:lnTo>
-                  <a:lnTo>
-                    <a:pt x="931092" y="3311974"/>
-                  </a:lnTo>
-                  <a:lnTo>
-                    <a:pt x="859470" y="3321117"/>
-                  </a:lnTo>
-                  <a:lnTo>
-                    <a:pt x="787847" y="3329774"/>
-                  </a:lnTo>
-                  <a:lnTo>
-                    <a:pt x="716225" y="3337970"/>
-                  </a:lnTo>
-                  <a:lnTo>
-                    <a:pt x="644602" y="3345730"/>
-                  </a:lnTo>
-                  <a:lnTo>
-                    <a:pt x="572980" y="3353077"/>
-                  </a:lnTo>
-                  <a:lnTo>
-                    <a:pt x="501357" y="3360032"/>
-                  </a:lnTo>
-                  <a:lnTo>
-                    <a:pt x="429735" y="3366618"/>
-                  </a:lnTo>
-                  <a:lnTo>
-                    <a:pt x="358112" y="3372852"/>
-                  </a:lnTo>
-                  <a:lnTo>
-                    <a:pt x="286490" y="3378755"/>
-                  </a:lnTo>
-                  <a:lnTo>
-                    <a:pt x="214867" y="3384344"/>
-                  </a:lnTo>
-                  <a:lnTo>
-                    <a:pt x="143245" y="3389635"/>
-                  </a:lnTo>
-                  <a:lnTo>
-                    <a:pt x="71622" y="3394645"/>
-                  </a:lnTo>
-                  <a:lnTo>
-                    <a:pt x="0" y="3399388"/>
+                    <a:pt x="7090630" y="3475515"/>
+                  </a:lnTo>
+                  <a:lnTo>
+                    <a:pt x="7019007" y="3474823"/>
+                  </a:lnTo>
+                  <a:lnTo>
+                    <a:pt x="6947385" y="3474073"/>
+                  </a:lnTo>
+                  <a:lnTo>
+                    <a:pt x="6875762" y="3473259"/>
+                  </a:lnTo>
+                  <a:lnTo>
+                    <a:pt x="6804139" y="3472378"/>
+                  </a:lnTo>
+                  <a:lnTo>
+                    <a:pt x="6732517" y="3471422"/>
+                  </a:lnTo>
+                  <a:lnTo>
+                    <a:pt x="6660894" y="3470386"/>
+                  </a:lnTo>
+                  <a:lnTo>
+                    <a:pt x="6589272" y="3469262"/>
+                  </a:lnTo>
+                  <a:lnTo>
+                    <a:pt x="6517649" y="3468044"/>
+                  </a:lnTo>
+                  <a:lnTo>
+                    <a:pt x="6446027" y="3466724"/>
+                  </a:lnTo>
+                  <a:lnTo>
+                    <a:pt x="6374404" y="3465293"/>
+                  </a:lnTo>
+                  <a:lnTo>
+                    <a:pt x="6302782" y="3463742"/>
+                  </a:lnTo>
+                  <a:lnTo>
+                    <a:pt x="6231159" y="3462060"/>
+                  </a:lnTo>
+                  <a:lnTo>
+                    <a:pt x="6159537" y="3460236"/>
+                  </a:lnTo>
+                  <a:lnTo>
+                    <a:pt x="6087914" y="3458260"/>
+                  </a:lnTo>
+                  <a:lnTo>
+                    <a:pt x="6016292" y="3456117"/>
+                  </a:lnTo>
+                  <a:lnTo>
+                    <a:pt x="5944669" y="3453794"/>
+                  </a:lnTo>
+                  <a:lnTo>
+                    <a:pt x="5873047" y="3451276"/>
+                  </a:lnTo>
+                  <a:lnTo>
+                    <a:pt x="5801424" y="3448546"/>
+                  </a:lnTo>
+                  <a:lnTo>
+                    <a:pt x="5729802" y="3445586"/>
+                  </a:lnTo>
+                  <a:lnTo>
+                    <a:pt x="5658179" y="3442378"/>
+                  </a:lnTo>
+                  <a:lnTo>
+                    <a:pt x="5586557" y="3438900"/>
+                  </a:lnTo>
+                  <a:lnTo>
+                    <a:pt x="5514934" y="3435129"/>
+                  </a:lnTo>
+                  <a:lnTo>
+                    <a:pt x="5443311" y="3431041"/>
+                  </a:lnTo>
+                  <a:lnTo>
+                    <a:pt x="5371689" y="3426610"/>
+                  </a:lnTo>
+                  <a:lnTo>
+                    <a:pt x="5300066" y="3421806"/>
+                  </a:lnTo>
+                  <a:lnTo>
+                    <a:pt x="5228444" y="3416599"/>
+                  </a:lnTo>
+                  <a:lnTo>
+                    <a:pt x="5156821" y="3410953"/>
+                  </a:lnTo>
+                  <a:lnTo>
+                    <a:pt x="5085199" y="3404833"/>
+                  </a:lnTo>
+                  <a:lnTo>
+                    <a:pt x="5013576" y="3398198"/>
+                  </a:lnTo>
+                  <a:lnTo>
+                    <a:pt x="4941954" y="3391005"/>
+                  </a:lnTo>
+                  <a:lnTo>
+                    <a:pt x="4870331" y="3383208"/>
+                  </a:lnTo>
+                  <a:lnTo>
+                    <a:pt x="4798709" y="3374755"/>
+                  </a:lnTo>
+                  <a:lnTo>
+                    <a:pt x="4727086" y="3365592"/>
+                  </a:lnTo>
+                  <a:lnTo>
+                    <a:pt x="4655464" y="3355657"/>
+                  </a:lnTo>
+                  <a:lnTo>
+                    <a:pt x="4583841" y="3344888"/>
+                  </a:lnTo>
+                  <a:lnTo>
+                    <a:pt x="4512219" y="3333213"/>
+                  </a:lnTo>
+                  <a:lnTo>
+                    <a:pt x="4440596" y="3320557"/>
+                  </a:lnTo>
+                  <a:lnTo>
+                    <a:pt x="4368974" y="3306837"/>
+                  </a:lnTo>
+                  <a:lnTo>
+                    <a:pt x="4297351" y="3291963"/>
+                  </a:lnTo>
+                  <a:lnTo>
+                    <a:pt x="4225729" y="3275838"/>
+                  </a:lnTo>
+                  <a:lnTo>
+                    <a:pt x="4154106" y="3258358"/>
+                  </a:lnTo>
+                  <a:lnTo>
+                    <a:pt x="4082483" y="3239408"/>
+                  </a:lnTo>
+                  <a:lnTo>
+                    <a:pt x="4010861" y="3218865"/>
+                  </a:lnTo>
+                  <a:lnTo>
+                    <a:pt x="3939238" y="3196595"/>
+                  </a:lnTo>
+                  <a:lnTo>
+                    <a:pt x="3867616" y="3172452"/>
+                  </a:lnTo>
+                  <a:lnTo>
+                    <a:pt x="3795993" y="3146280"/>
+                  </a:lnTo>
+                  <a:lnTo>
+                    <a:pt x="3724371" y="3117907"/>
+                  </a:lnTo>
+                  <a:lnTo>
+                    <a:pt x="3652748" y="3087148"/>
+                  </a:lnTo>
+                  <a:lnTo>
+                    <a:pt x="3581126" y="3053803"/>
+                  </a:lnTo>
+                  <a:lnTo>
+                    <a:pt x="3509503" y="3017655"/>
+                  </a:lnTo>
+                  <a:lnTo>
+                    <a:pt x="3437881" y="2978468"/>
+                  </a:lnTo>
+                  <a:lnTo>
+                    <a:pt x="3366258" y="2935986"/>
+                  </a:lnTo>
+                  <a:lnTo>
+                    <a:pt x="3294636" y="2889932"/>
+                  </a:lnTo>
+                  <a:lnTo>
+                    <a:pt x="3223013" y="2840006"/>
+                  </a:lnTo>
+                  <a:lnTo>
+                    <a:pt x="3151391" y="2785883"/>
+                  </a:lnTo>
+                  <a:lnTo>
+                    <a:pt x="3079768" y="2727209"/>
+                  </a:lnTo>
+                  <a:lnTo>
+                    <a:pt x="3008146" y="2663602"/>
+                  </a:lnTo>
+                  <a:lnTo>
+                    <a:pt x="2936523" y="2692410"/>
+                  </a:lnTo>
+                  <a:lnTo>
+                    <a:pt x="2864901" y="2734545"/>
+                  </a:lnTo>
+                  <a:lnTo>
+                    <a:pt x="2793278" y="2774435"/>
+                  </a:lnTo>
+                  <a:lnTo>
+                    <a:pt x="2721655" y="2812202"/>
+                  </a:lnTo>
+                  <a:lnTo>
+                    <a:pt x="2650033" y="2847958"/>
+                  </a:lnTo>
+                  <a:lnTo>
+                    <a:pt x="2578410" y="2881810"/>
+                  </a:lnTo>
+                  <a:lnTo>
+                    <a:pt x="2506788" y="2913860"/>
+                  </a:lnTo>
+                  <a:lnTo>
+                    <a:pt x="2435165" y="2944203"/>
+                  </a:lnTo>
+                  <a:lnTo>
+                    <a:pt x="2363543" y="2972931"/>
+                  </a:lnTo>
+                  <a:lnTo>
+                    <a:pt x="2291920" y="3000129"/>
+                  </a:lnTo>
+                  <a:lnTo>
+                    <a:pt x="2220298" y="3025879"/>
+                  </a:lnTo>
+                  <a:lnTo>
+                    <a:pt x="2148675" y="3050257"/>
+                  </a:lnTo>
+                  <a:lnTo>
+                    <a:pt x="2077053" y="3073338"/>
+                  </a:lnTo>
+                  <a:lnTo>
+                    <a:pt x="2005430" y="3095190"/>
+                  </a:lnTo>
+                  <a:lnTo>
+                    <a:pt x="1933808" y="3115879"/>
+                  </a:lnTo>
+                  <a:lnTo>
+                    <a:pt x="1862185" y="3135465"/>
+                  </a:lnTo>
+                  <a:lnTo>
+                    <a:pt x="1790563" y="3154009"/>
+                  </a:lnTo>
+                  <a:lnTo>
+                    <a:pt x="1718940" y="3171566"/>
+                  </a:lnTo>
+                  <a:lnTo>
+                    <a:pt x="1647318" y="3188188"/>
+                  </a:lnTo>
+                  <a:lnTo>
+                    <a:pt x="1575695" y="3203925"/>
+                  </a:lnTo>
+                  <a:lnTo>
+                    <a:pt x="1504073" y="3218824"/>
+                  </a:lnTo>
+                  <a:lnTo>
+                    <a:pt x="1432450" y="3232929"/>
+                  </a:lnTo>
+                  <a:lnTo>
+                    <a:pt x="1360827" y="3246284"/>
+                  </a:lnTo>
+                  <a:lnTo>
+                    <a:pt x="1289205" y="3258927"/>
+                  </a:lnTo>
+                  <a:lnTo>
+                    <a:pt x="1217582" y="3270898"/>
+                  </a:lnTo>
+                  <a:lnTo>
+                    <a:pt x="1145960" y="3282231"/>
+                  </a:lnTo>
+                  <a:lnTo>
+                    <a:pt x="1074337" y="3292960"/>
+                  </a:lnTo>
+                  <a:lnTo>
+                    <a:pt x="1002715" y="3303119"/>
+                  </a:lnTo>
+                  <a:lnTo>
+                    <a:pt x="931092" y="3312736"/>
+                  </a:lnTo>
+                  <a:lnTo>
+                    <a:pt x="859470" y="3321841"/>
+                  </a:lnTo>
+                  <a:lnTo>
+                    <a:pt x="787847" y="3330462"/>
+                  </a:lnTo>
+                  <a:lnTo>
+                    <a:pt x="716225" y="3338623"/>
+                  </a:lnTo>
+                  <a:lnTo>
+                    <a:pt x="644602" y="3346350"/>
+                  </a:lnTo>
+                  <a:lnTo>
+                    <a:pt x="572980" y="3353666"/>
+                  </a:lnTo>
+                  <a:lnTo>
+                    <a:pt x="501357" y="3360592"/>
+                  </a:lnTo>
+                  <a:lnTo>
+                    <a:pt x="429735" y="3367149"/>
+                  </a:lnTo>
+                  <a:lnTo>
+                    <a:pt x="358112" y="3373357"/>
+                  </a:lnTo>
+                  <a:lnTo>
+                    <a:pt x="286490" y="3379235"/>
+                  </a:lnTo>
+                  <a:lnTo>
+                    <a:pt x="214867" y="3384800"/>
+                  </a:lnTo>
+                  <a:lnTo>
+                    <a:pt x="143245" y="3390068"/>
+                  </a:lnTo>
+                  <a:lnTo>
+                    <a:pt x="71622" y="3395056"/>
+                  </a:lnTo>
+                  <a:lnTo>
+                    <a:pt x="0" y="3399778"/>
                   </a:lnTo>
                   <a:close/>
                 </a:path>
@@ -3474,150 +3474,150 @@
           </p:nvSpPr>
           <p:spPr>
             <a:xfrm>
-              <a:off x="2891366" y="2073503"/>
-              <a:ext cx="3152563" cy="2644537"/>
+              <a:off x="2897184" y="2073503"/>
+              <a:ext cx="3151398" cy="2647907"/>
             </a:xfrm>
             <a:custGeom>
               <a:avLst/>
               <a:pathLst>
-                <a:path w="3152563" h="2644537">
+                <a:path w="3151398" h="2647907">
                   <a:moveTo>
                     <a:pt x="0" y="0"/>
                   </a:moveTo>
                   <a:lnTo>
-                    <a:pt x="71246" y="268807"/>
-                  </a:lnTo>
-                  <a:lnTo>
-                    <a:pt x="142868" y="518080"/>
-                  </a:lnTo>
-                  <a:lnTo>
-                    <a:pt x="214491" y="748026"/>
-                  </a:lnTo>
-                  <a:lnTo>
-                    <a:pt x="286114" y="960143"/>
-                  </a:lnTo>
-                  <a:lnTo>
-                    <a:pt x="357736" y="1155814"/>
-                  </a:lnTo>
-                  <a:lnTo>
-                    <a:pt x="429359" y="1336312"/>
-                  </a:lnTo>
-                  <a:lnTo>
-                    <a:pt x="500981" y="1502816"/>
-                  </a:lnTo>
-                  <a:lnTo>
-                    <a:pt x="572604" y="1656410"/>
-                  </a:lnTo>
-                  <a:lnTo>
-                    <a:pt x="644226" y="1798094"/>
-                  </a:lnTo>
-                  <a:lnTo>
-                    <a:pt x="715849" y="1928793"/>
-                  </a:lnTo>
-                  <a:lnTo>
-                    <a:pt x="787471" y="2049358"/>
-                  </a:lnTo>
-                  <a:lnTo>
-                    <a:pt x="859094" y="2160575"/>
-                  </a:lnTo>
-                  <a:lnTo>
-                    <a:pt x="930716" y="2263168"/>
-                  </a:lnTo>
-                  <a:lnTo>
-                    <a:pt x="1002339" y="2357807"/>
-                  </a:lnTo>
-                  <a:lnTo>
-                    <a:pt x="1073961" y="2445108"/>
-                  </a:lnTo>
-                  <a:lnTo>
-                    <a:pt x="1145584" y="2525640"/>
-                  </a:lnTo>
-                  <a:lnTo>
-                    <a:pt x="1217206" y="2599928"/>
-                  </a:lnTo>
-                  <a:lnTo>
-                    <a:pt x="1288829" y="2644537"/>
-                  </a:lnTo>
-                  <a:lnTo>
-                    <a:pt x="1360451" y="2597354"/>
-                  </a:lnTo>
-                  <a:lnTo>
-                    <a:pt x="1432074" y="2547519"/>
-                  </a:lnTo>
-                  <a:lnTo>
-                    <a:pt x="1503696" y="2494881"/>
-                  </a:lnTo>
-                  <a:lnTo>
-                    <a:pt x="1575319" y="2439283"/>
-                  </a:lnTo>
-                  <a:lnTo>
-                    <a:pt x="1646941" y="2380560"/>
-                  </a:lnTo>
-                  <a:lnTo>
-                    <a:pt x="1718564" y="2318536"/>
-                  </a:lnTo>
-                  <a:lnTo>
-                    <a:pt x="1790187" y="2253024"/>
-                  </a:lnTo>
-                  <a:lnTo>
-                    <a:pt x="1861809" y="2183828"/>
-                  </a:lnTo>
-                  <a:lnTo>
-                    <a:pt x="1933432" y="2110743"/>
-                  </a:lnTo>
-                  <a:lnTo>
-                    <a:pt x="2005054" y="2033548"/>
-                  </a:lnTo>
-                  <a:lnTo>
-                    <a:pt x="2076677" y="1952013"/>
-                  </a:lnTo>
-                  <a:lnTo>
-                    <a:pt x="2148299" y="1865894"/>
-                  </a:lnTo>
-                  <a:lnTo>
-                    <a:pt x="2219922" y="1774933"/>
-                  </a:lnTo>
-                  <a:lnTo>
-                    <a:pt x="2291544" y="1678858"/>
-                  </a:lnTo>
-                  <a:lnTo>
-                    <a:pt x="2363167" y="1577381"/>
-                  </a:lnTo>
-                  <a:lnTo>
-                    <a:pt x="2434789" y="1470199"/>
-                  </a:lnTo>
-                  <a:lnTo>
-                    <a:pt x="2506412" y="1356991"/>
-                  </a:lnTo>
-                  <a:lnTo>
-                    <a:pt x="2578034" y="1237418"/>
-                  </a:lnTo>
-                  <a:lnTo>
-                    <a:pt x="2649657" y="1111122"/>
-                  </a:lnTo>
-                  <a:lnTo>
-                    <a:pt x="2721279" y="977726"/>
-                  </a:lnTo>
-                  <a:lnTo>
-                    <a:pt x="2792902" y="836829"/>
-                  </a:lnTo>
-                  <a:lnTo>
-                    <a:pt x="2864524" y="688011"/>
-                  </a:lnTo>
-                  <a:lnTo>
-                    <a:pt x="2936147" y="530825"/>
-                  </a:lnTo>
-                  <a:lnTo>
-                    <a:pt x="3007769" y="364802"/>
-                  </a:lnTo>
-                  <a:lnTo>
-                    <a:pt x="3079392" y="189445"/>
-                  </a:lnTo>
-                  <a:lnTo>
-                    <a:pt x="3151015" y="4229"/>
-                  </a:lnTo>
-                  <a:lnTo>
-                    <a:pt x="3152563" y="0"/>
+                    <a:pt x="65428" y="248484"/>
+                  </a:lnTo>
+                  <a:lnTo>
+                    <a:pt x="137050" y="499398"/>
+                  </a:lnTo>
+                  <a:lnTo>
+                    <a:pt x="208673" y="730852"/>
+                  </a:lnTo>
+                  <a:lnTo>
+                    <a:pt x="280295" y="944355"/>
+                  </a:lnTo>
+                  <a:lnTo>
+                    <a:pt x="351918" y="1141300"/>
+                  </a:lnTo>
+                  <a:lnTo>
+                    <a:pt x="423540" y="1322970"/>
+                  </a:lnTo>
+                  <a:lnTo>
+                    <a:pt x="495163" y="1490551"/>
+                  </a:lnTo>
+                  <a:lnTo>
+                    <a:pt x="566785" y="1645135"/>
+                  </a:lnTo>
+                  <a:lnTo>
+                    <a:pt x="638408" y="1787730"/>
+                  </a:lnTo>
+                  <a:lnTo>
+                    <a:pt x="710030" y="1919266"/>
+                  </a:lnTo>
+                  <a:lnTo>
+                    <a:pt x="781653" y="2040601"/>
+                  </a:lnTo>
+                  <a:lnTo>
+                    <a:pt x="853275" y="2152526"/>
+                  </a:lnTo>
+                  <a:lnTo>
+                    <a:pt x="924898" y="2255770"/>
+                  </a:lnTo>
+                  <a:lnTo>
+                    <a:pt x="996520" y="2351006"/>
+                  </a:lnTo>
+                  <a:lnTo>
+                    <a:pt x="1068143" y="2438857"/>
+                  </a:lnTo>
+                  <a:lnTo>
+                    <a:pt x="1139766" y="2519894"/>
+                  </a:lnTo>
+                  <a:lnTo>
+                    <a:pt x="1211388" y="2594647"/>
+                  </a:lnTo>
+                  <a:lnTo>
+                    <a:pt x="1283011" y="2647907"/>
+                  </a:lnTo>
+                  <a:lnTo>
+                    <a:pt x="1354633" y="2600900"/>
+                  </a:lnTo>
+                  <a:lnTo>
+                    <a:pt x="1426256" y="2551250"/>
+                  </a:lnTo>
+                  <a:lnTo>
+                    <a:pt x="1497878" y="2498808"/>
+                  </a:lnTo>
+                  <a:lnTo>
+                    <a:pt x="1569501" y="2443416"/>
+                  </a:lnTo>
+                  <a:lnTo>
+                    <a:pt x="1641123" y="2384909"/>
+                  </a:lnTo>
+                  <a:lnTo>
+                    <a:pt x="1712746" y="2323112"/>
+                  </a:lnTo>
+                  <a:lnTo>
+                    <a:pt x="1784368" y="2257839"/>
+                  </a:lnTo>
+                  <a:lnTo>
+                    <a:pt x="1855991" y="2188896"/>
+                  </a:lnTo>
+                  <a:lnTo>
+                    <a:pt x="1927613" y="2116075"/>
+                  </a:lnTo>
+                  <a:lnTo>
+                    <a:pt x="1999236" y="2039159"/>
+                  </a:lnTo>
+                  <a:lnTo>
+                    <a:pt x="2070858" y="1957918"/>
+                  </a:lnTo>
+                  <a:lnTo>
+                    <a:pt x="2142481" y="1872107"/>
+                  </a:lnTo>
+                  <a:lnTo>
+                    <a:pt x="2214103" y="1781471"/>
+                  </a:lnTo>
+                  <a:lnTo>
+                    <a:pt x="2285726" y="1685737"/>
+                  </a:lnTo>
+                  <a:lnTo>
+                    <a:pt x="2357348" y="1584619"/>
+                  </a:lnTo>
+                  <a:lnTo>
+                    <a:pt x="2428971" y="1477815"/>
+                  </a:lnTo>
+                  <a:lnTo>
+                    <a:pt x="2500594" y="1365004"/>
+                  </a:lnTo>
+                  <a:lnTo>
+                    <a:pt x="2572216" y="1245848"/>
+                  </a:lnTo>
+                  <a:lnTo>
+                    <a:pt x="2643839" y="1119992"/>
+                  </a:lnTo>
+                  <a:lnTo>
+                    <a:pt x="2715461" y="987057"/>
+                  </a:lnTo>
+                  <a:lnTo>
+                    <a:pt x="2787084" y="846647"/>
+                  </a:lnTo>
+                  <a:lnTo>
+                    <a:pt x="2858706" y="698340"/>
+                  </a:lnTo>
+                  <a:lnTo>
+                    <a:pt x="2930329" y="541692"/>
+                  </a:lnTo>
+                  <a:lnTo>
+                    <a:pt x="3001951" y="376235"/>
+                  </a:lnTo>
+                  <a:lnTo>
+                    <a:pt x="3073574" y="201472"/>
+                  </a:lnTo>
+                  <a:lnTo>
+                    <a:pt x="3145196" y="16881"/>
+                  </a:lnTo>
+                  <a:lnTo>
+                    <a:pt x="3151398" y="0"/>
                   </a:lnTo>
                 </a:path>
               </a:pathLst>
@@ -3637,312 +3637,312 @@
           </p:nvSpPr>
           <p:spPr>
             <a:xfrm>
-              <a:off x="1172049" y="4741959"/>
-              <a:ext cx="7090630" cy="807098"/>
+              <a:off x="1172049" y="4737105"/>
+              <a:ext cx="7090630" cy="811913"/>
             </a:xfrm>
             <a:custGeom>
               <a:avLst/>
               <a:pathLst>
-                <a:path w="7090630" h="807098">
+                <a:path w="7090630" h="811913">
                   <a:moveTo>
-                    <a:pt x="7090630" y="807098"/>
+                    <a:pt x="7090630" y="811913"/>
                   </a:moveTo>
                   <a:lnTo>
-                    <a:pt x="7019007" y="806409"/>
-                  </a:lnTo>
-                  <a:lnTo>
-                    <a:pt x="6947385" y="805663"/>
-                  </a:lnTo>
-                  <a:lnTo>
-                    <a:pt x="6875762" y="804853"/>
-                  </a:lnTo>
-                  <a:lnTo>
-                    <a:pt x="6804139" y="803976"/>
-                  </a:lnTo>
-                  <a:lnTo>
-                    <a:pt x="6732517" y="803025"/>
-                  </a:lnTo>
-                  <a:lnTo>
-                    <a:pt x="6660894" y="801994"/>
-                  </a:lnTo>
-                  <a:lnTo>
-                    <a:pt x="6589272" y="800876"/>
-                  </a:lnTo>
-                  <a:lnTo>
-                    <a:pt x="6517649" y="799665"/>
-                  </a:lnTo>
-                  <a:lnTo>
-                    <a:pt x="6446027" y="798352"/>
-                  </a:lnTo>
-                  <a:lnTo>
-                    <a:pt x="6374404" y="796928"/>
-                  </a:lnTo>
-                  <a:lnTo>
-                    <a:pt x="6302782" y="795384"/>
-                  </a:lnTo>
-                  <a:lnTo>
-                    <a:pt x="6231159" y="793711"/>
-                  </a:lnTo>
-                  <a:lnTo>
-                    <a:pt x="6159537" y="791897"/>
-                  </a:lnTo>
-                  <a:lnTo>
-                    <a:pt x="6087914" y="789931"/>
-                  </a:lnTo>
-                  <a:lnTo>
-                    <a:pt x="6016292" y="787800"/>
-                  </a:lnTo>
-                  <a:lnTo>
-                    <a:pt x="5944669" y="785489"/>
-                  </a:lnTo>
-                  <a:lnTo>
-                    <a:pt x="5873047" y="782984"/>
-                  </a:lnTo>
-                  <a:lnTo>
-                    <a:pt x="5801424" y="780269"/>
-                  </a:lnTo>
-                  <a:lnTo>
-                    <a:pt x="5729802" y="777325"/>
-                  </a:lnTo>
-                  <a:lnTo>
-                    <a:pt x="5658179" y="774134"/>
-                  </a:lnTo>
-                  <a:lnTo>
-                    <a:pt x="5586557" y="770674"/>
-                  </a:lnTo>
-                  <a:lnTo>
-                    <a:pt x="5514934" y="766924"/>
-                  </a:lnTo>
-                  <a:lnTo>
-                    <a:pt x="5443311" y="762859"/>
-                  </a:lnTo>
-                  <a:lnTo>
-                    <a:pt x="5371689" y="758452"/>
-                  </a:lnTo>
-                  <a:lnTo>
-                    <a:pt x="5300066" y="753674"/>
-                  </a:lnTo>
-                  <a:lnTo>
-                    <a:pt x="5228444" y="748495"/>
-                  </a:lnTo>
-                  <a:lnTo>
-                    <a:pt x="5156821" y="742881"/>
-                  </a:lnTo>
-                  <a:lnTo>
-                    <a:pt x="5085199" y="736795"/>
-                  </a:lnTo>
-                  <a:lnTo>
-                    <a:pt x="5013576" y="730197"/>
-                  </a:lnTo>
-                  <a:lnTo>
-                    <a:pt x="4941954" y="723045"/>
-                  </a:lnTo>
-                  <a:lnTo>
-                    <a:pt x="4870331" y="715291"/>
-                  </a:lnTo>
-                  <a:lnTo>
-                    <a:pt x="4798709" y="706886"/>
-                  </a:lnTo>
-                  <a:lnTo>
-                    <a:pt x="4727086" y="697774"/>
-                  </a:lnTo>
-                  <a:lnTo>
-                    <a:pt x="4655464" y="687896"/>
-                  </a:lnTo>
-                  <a:lnTo>
-                    <a:pt x="4583841" y="677189"/>
-                  </a:lnTo>
-                  <a:lnTo>
-                    <a:pt x="4512219" y="665581"/>
-                  </a:lnTo>
-                  <a:lnTo>
-                    <a:pt x="4440596" y="652997"/>
-                  </a:lnTo>
-                  <a:lnTo>
-                    <a:pt x="4368974" y="639356"/>
-                  </a:lnTo>
-                  <a:lnTo>
-                    <a:pt x="4297351" y="624568"/>
-                  </a:lnTo>
-                  <a:lnTo>
-                    <a:pt x="4225729" y="608537"/>
-                  </a:lnTo>
-                  <a:lnTo>
-                    <a:pt x="4154106" y="591159"/>
-                  </a:lnTo>
-                  <a:lnTo>
-                    <a:pt x="4082483" y="572320"/>
-                  </a:lnTo>
-                  <a:lnTo>
-                    <a:pt x="4010861" y="551897"/>
-                  </a:lnTo>
-                  <a:lnTo>
-                    <a:pt x="3939238" y="529758"/>
-                  </a:lnTo>
-                  <a:lnTo>
-                    <a:pt x="3867616" y="505759"/>
-                  </a:lnTo>
-                  <a:lnTo>
-                    <a:pt x="3795993" y="479741"/>
-                  </a:lnTo>
-                  <a:lnTo>
-                    <a:pt x="3724371" y="451537"/>
-                  </a:lnTo>
-                  <a:lnTo>
-                    <a:pt x="3652748" y="420963"/>
-                  </a:lnTo>
-                  <a:lnTo>
-                    <a:pt x="3581126" y="387818"/>
-                  </a:lnTo>
-                  <a:lnTo>
-                    <a:pt x="3509503" y="351888"/>
-                  </a:lnTo>
-                  <a:lnTo>
-                    <a:pt x="3437881" y="312937"/>
-                  </a:lnTo>
-                  <a:lnTo>
-                    <a:pt x="3366258" y="270713"/>
-                  </a:lnTo>
-                  <a:lnTo>
-                    <a:pt x="3294636" y="224940"/>
-                  </a:lnTo>
-                  <a:lnTo>
-                    <a:pt x="3223013" y="175319"/>
-                  </a:lnTo>
-                  <a:lnTo>
-                    <a:pt x="3151391" y="121527"/>
-                  </a:lnTo>
-                  <a:lnTo>
-                    <a:pt x="3079768" y="63214"/>
+                    <a:pt x="7019007" y="811221"/>
+                  </a:lnTo>
+                  <a:lnTo>
+                    <a:pt x="6947385" y="810470"/>
+                  </a:lnTo>
+                  <a:lnTo>
+                    <a:pt x="6875762" y="809657"/>
+                  </a:lnTo>
+                  <a:lnTo>
+                    <a:pt x="6804139" y="808775"/>
+                  </a:lnTo>
+                  <a:lnTo>
+                    <a:pt x="6732517" y="807819"/>
+                  </a:lnTo>
+                  <a:lnTo>
+                    <a:pt x="6660894" y="806783"/>
+                  </a:lnTo>
+                  <a:lnTo>
+                    <a:pt x="6589272" y="805660"/>
+                  </a:lnTo>
+                  <a:lnTo>
+                    <a:pt x="6517649" y="804442"/>
+                  </a:lnTo>
+                  <a:lnTo>
+                    <a:pt x="6446027" y="803122"/>
+                  </a:lnTo>
+                  <a:lnTo>
+                    <a:pt x="6374404" y="801691"/>
+                  </a:lnTo>
+                  <a:lnTo>
+                    <a:pt x="6302782" y="800139"/>
+                  </a:lnTo>
+                  <a:lnTo>
+                    <a:pt x="6231159" y="798457"/>
+                  </a:lnTo>
+                  <a:lnTo>
+                    <a:pt x="6159537" y="796634"/>
+                  </a:lnTo>
+                  <a:lnTo>
+                    <a:pt x="6087914" y="794657"/>
+                  </a:lnTo>
+                  <a:lnTo>
+                    <a:pt x="6016292" y="792515"/>
+                  </a:lnTo>
+                  <a:lnTo>
+                    <a:pt x="5944669" y="790192"/>
+                  </a:lnTo>
+                  <a:lnTo>
+                    <a:pt x="5873047" y="787673"/>
+                  </a:lnTo>
+                  <a:lnTo>
+                    <a:pt x="5801424" y="784943"/>
+                  </a:lnTo>
+                  <a:lnTo>
+                    <a:pt x="5729802" y="781984"/>
+                  </a:lnTo>
+                  <a:lnTo>
+                    <a:pt x="5658179" y="778775"/>
+                  </a:lnTo>
+                  <a:lnTo>
+                    <a:pt x="5586557" y="775297"/>
+                  </a:lnTo>
+                  <a:lnTo>
+                    <a:pt x="5514934" y="771527"/>
+                  </a:lnTo>
+                  <a:lnTo>
+                    <a:pt x="5443311" y="767439"/>
+                  </a:lnTo>
+                  <a:lnTo>
+                    <a:pt x="5371689" y="763008"/>
+                  </a:lnTo>
+                  <a:lnTo>
+                    <a:pt x="5300066" y="758204"/>
+                  </a:lnTo>
+                  <a:lnTo>
+                    <a:pt x="5228444" y="752996"/>
+                  </a:lnTo>
+                  <a:lnTo>
+                    <a:pt x="5156821" y="747351"/>
+                  </a:lnTo>
+                  <a:lnTo>
+                    <a:pt x="5085199" y="741230"/>
+                  </a:lnTo>
+                  <a:lnTo>
+                    <a:pt x="5013576" y="734596"/>
+                  </a:lnTo>
+                  <a:lnTo>
+                    <a:pt x="4941954" y="727403"/>
+                  </a:lnTo>
+                  <a:lnTo>
+                    <a:pt x="4870331" y="719606"/>
+                  </a:lnTo>
+                  <a:lnTo>
+                    <a:pt x="4798709" y="711153"/>
+                  </a:lnTo>
+                  <a:lnTo>
+                    <a:pt x="4727086" y="701989"/>
+                  </a:lnTo>
+                  <a:lnTo>
+                    <a:pt x="4655464" y="692055"/>
+                  </a:lnTo>
+                  <a:lnTo>
+                    <a:pt x="4583841" y="681286"/>
+                  </a:lnTo>
+                  <a:lnTo>
+                    <a:pt x="4512219" y="669611"/>
+                  </a:lnTo>
+                  <a:lnTo>
+                    <a:pt x="4440596" y="656955"/>
+                  </a:lnTo>
+                  <a:lnTo>
+                    <a:pt x="4368974" y="643234"/>
+                  </a:lnTo>
+                  <a:lnTo>
+                    <a:pt x="4297351" y="628361"/>
+                  </a:lnTo>
+                  <a:lnTo>
+                    <a:pt x="4225729" y="612236"/>
+                  </a:lnTo>
+                  <a:lnTo>
+                    <a:pt x="4154106" y="594756"/>
+                  </a:lnTo>
+                  <a:lnTo>
+                    <a:pt x="4082483" y="575806"/>
+                  </a:lnTo>
+                  <a:lnTo>
+                    <a:pt x="4010861" y="555263"/>
+                  </a:lnTo>
+                  <a:lnTo>
+                    <a:pt x="3939238" y="532993"/>
+                  </a:lnTo>
+                  <a:lnTo>
+                    <a:pt x="3867616" y="508850"/>
+                  </a:lnTo>
+                  <a:lnTo>
+                    <a:pt x="3795993" y="482677"/>
+                  </a:lnTo>
+                  <a:lnTo>
+                    <a:pt x="3724371" y="454304"/>
+                  </a:lnTo>
+                  <a:lnTo>
+                    <a:pt x="3652748" y="423546"/>
+                  </a:lnTo>
+                  <a:lnTo>
+                    <a:pt x="3581126" y="390201"/>
+                  </a:lnTo>
+                  <a:lnTo>
+                    <a:pt x="3509503" y="354053"/>
+                  </a:lnTo>
+                  <a:lnTo>
+                    <a:pt x="3437881" y="314866"/>
+                  </a:lnTo>
+                  <a:lnTo>
+                    <a:pt x="3366258" y="272384"/>
+                  </a:lnTo>
+                  <a:lnTo>
+                    <a:pt x="3294636" y="226330"/>
+                  </a:lnTo>
+                  <a:lnTo>
+                    <a:pt x="3223013" y="176404"/>
+                  </a:lnTo>
+                  <a:lnTo>
+                    <a:pt x="3151391" y="122281"/>
+                  </a:lnTo>
+                  <a:lnTo>
+                    <a:pt x="3079768" y="63607"/>
                   </a:lnTo>
                   <a:lnTo>
                     <a:pt x="3008146" y="0"/>
                   </a:lnTo>
                   <a:lnTo>
-                    <a:pt x="2936523" y="20753"/>
-                  </a:lnTo>
-                  <a:lnTo>
-                    <a:pt x="2864901" y="63046"/>
-                  </a:lnTo>
-                  <a:lnTo>
-                    <a:pt x="2793278" y="103089"/>
-                  </a:lnTo>
-                  <a:lnTo>
-                    <a:pt x="2721655" y="141000"/>
-                  </a:lnTo>
-                  <a:lnTo>
-                    <a:pt x="2650033" y="176892"/>
-                  </a:lnTo>
-                  <a:lnTo>
-                    <a:pt x="2578410" y="210875"/>
-                  </a:lnTo>
-                  <a:lnTo>
-                    <a:pt x="2506788" y="243048"/>
-                  </a:lnTo>
-                  <a:lnTo>
-                    <a:pt x="2435165" y="273509"/>
-                  </a:lnTo>
-                  <a:lnTo>
-                    <a:pt x="2363543" y="302348"/>
-                  </a:lnTo>
-                  <a:lnTo>
-                    <a:pt x="2291920" y="329652"/>
-                  </a:lnTo>
-                  <a:lnTo>
-                    <a:pt x="2220298" y="355503"/>
-                  </a:lnTo>
-                  <a:lnTo>
-                    <a:pt x="2148675" y="379978"/>
-                  </a:lnTo>
-                  <a:lnTo>
-                    <a:pt x="2077053" y="403150"/>
-                  </a:lnTo>
-                  <a:lnTo>
-                    <a:pt x="2005430" y="425088"/>
-                  </a:lnTo>
-                  <a:lnTo>
-                    <a:pt x="1933808" y="445859"/>
-                  </a:lnTo>
-                  <a:lnTo>
-                    <a:pt x="1862185" y="465524"/>
-                  </a:lnTo>
-                  <a:lnTo>
-                    <a:pt x="1790563" y="484142"/>
-                  </a:lnTo>
-                  <a:lnTo>
-                    <a:pt x="1718940" y="501769"/>
-                  </a:lnTo>
-                  <a:lnTo>
-                    <a:pt x="1647318" y="518458"/>
-                  </a:lnTo>
-                  <a:lnTo>
-                    <a:pt x="1575695" y="534258"/>
-                  </a:lnTo>
-                  <a:lnTo>
-                    <a:pt x="1504073" y="549218"/>
-                  </a:lnTo>
-                  <a:lnTo>
-                    <a:pt x="1432450" y="563381"/>
-                  </a:lnTo>
-                  <a:lnTo>
-                    <a:pt x="1360827" y="576790"/>
-                  </a:lnTo>
-                  <a:lnTo>
-                    <a:pt x="1289205" y="589486"/>
-                  </a:lnTo>
-                  <a:lnTo>
-                    <a:pt x="1217582" y="601506"/>
-                  </a:lnTo>
-                  <a:lnTo>
-                    <a:pt x="1145960" y="612885"/>
-                  </a:lnTo>
-                  <a:lnTo>
-                    <a:pt x="1074337" y="623659"/>
-                  </a:lnTo>
-                  <a:lnTo>
-                    <a:pt x="1002715" y="633860"/>
-                  </a:lnTo>
-                  <a:lnTo>
-                    <a:pt x="931092" y="643518"/>
-                  </a:lnTo>
-                  <a:lnTo>
-                    <a:pt x="859470" y="652661"/>
-                  </a:lnTo>
-                  <a:lnTo>
-                    <a:pt x="787847" y="661318"/>
-                  </a:lnTo>
-                  <a:lnTo>
-                    <a:pt x="716225" y="669514"/>
-                  </a:lnTo>
-                  <a:lnTo>
-                    <a:pt x="644602" y="677274"/>
-                  </a:lnTo>
-                  <a:lnTo>
-                    <a:pt x="572980" y="684621"/>
-                  </a:lnTo>
-                  <a:lnTo>
-                    <a:pt x="501357" y="691576"/>
-                  </a:lnTo>
-                  <a:lnTo>
-                    <a:pt x="429735" y="698161"/>
-                  </a:lnTo>
-                  <a:lnTo>
-                    <a:pt x="358112" y="704396"/>
-                  </a:lnTo>
-                  <a:lnTo>
-                    <a:pt x="286490" y="710299"/>
-                  </a:lnTo>
-                  <a:lnTo>
-                    <a:pt x="214867" y="715888"/>
-                  </a:lnTo>
-                  <a:lnTo>
-                    <a:pt x="143245" y="721179"/>
-                  </a:lnTo>
-                  <a:lnTo>
-                    <a:pt x="71622" y="726189"/>
-                  </a:lnTo>
-                  <a:lnTo>
-                    <a:pt x="0" y="730932"/>
+                    <a:pt x="2936523" y="28808"/>
+                  </a:lnTo>
+                  <a:lnTo>
+                    <a:pt x="2864901" y="70942"/>
+                  </a:lnTo>
+                  <a:lnTo>
+                    <a:pt x="2793278" y="110833"/>
+                  </a:lnTo>
+                  <a:lnTo>
+                    <a:pt x="2721655" y="148600"/>
+                  </a:lnTo>
+                  <a:lnTo>
+                    <a:pt x="2650033" y="184356"/>
+                  </a:lnTo>
+                  <a:lnTo>
+                    <a:pt x="2578410" y="218208"/>
+                  </a:lnTo>
+                  <a:lnTo>
+                    <a:pt x="2506788" y="250258"/>
+                  </a:lnTo>
+                  <a:lnTo>
+                    <a:pt x="2435165" y="280601"/>
+                  </a:lnTo>
+                  <a:lnTo>
+                    <a:pt x="2363543" y="309328"/>
+                  </a:lnTo>
+                  <a:lnTo>
+                    <a:pt x="2291920" y="336526"/>
+                  </a:lnTo>
+                  <a:lnTo>
+                    <a:pt x="2220298" y="362276"/>
+                  </a:lnTo>
+                  <a:lnTo>
+                    <a:pt x="2148675" y="386655"/>
+                  </a:lnTo>
+                  <a:lnTo>
+                    <a:pt x="2077053" y="409736"/>
+                  </a:lnTo>
+                  <a:lnTo>
+                    <a:pt x="2005430" y="431588"/>
+                  </a:lnTo>
+                  <a:lnTo>
+                    <a:pt x="1933808" y="452276"/>
+                  </a:lnTo>
+                  <a:lnTo>
+                    <a:pt x="1862185" y="471863"/>
+                  </a:lnTo>
+                  <a:lnTo>
+                    <a:pt x="1790563" y="490407"/>
+                  </a:lnTo>
+                  <a:lnTo>
+                    <a:pt x="1718940" y="507964"/>
+                  </a:lnTo>
+                  <a:lnTo>
+                    <a:pt x="1647318" y="524586"/>
+                  </a:lnTo>
+                  <a:lnTo>
+                    <a:pt x="1575695" y="540322"/>
+                  </a:lnTo>
+                  <a:lnTo>
+                    <a:pt x="1504073" y="555221"/>
+                  </a:lnTo>
+                  <a:lnTo>
+                    <a:pt x="1432450" y="569327"/>
+                  </a:lnTo>
+                  <a:lnTo>
+                    <a:pt x="1360827" y="582682"/>
+                  </a:lnTo>
+                  <a:lnTo>
+                    <a:pt x="1289205" y="595325"/>
+                  </a:lnTo>
+                  <a:lnTo>
+                    <a:pt x="1217582" y="607295"/>
+                  </a:lnTo>
+                  <a:lnTo>
+                    <a:pt x="1145960" y="618628"/>
+                  </a:lnTo>
+                  <a:lnTo>
+                    <a:pt x="1074337" y="629358"/>
+                  </a:lnTo>
+                  <a:lnTo>
+                    <a:pt x="1002715" y="639516"/>
+                  </a:lnTo>
+                  <a:lnTo>
+                    <a:pt x="931092" y="649134"/>
+                  </a:lnTo>
+                  <a:lnTo>
+                    <a:pt x="859470" y="658239"/>
+                  </a:lnTo>
+                  <a:lnTo>
+                    <a:pt x="787847" y="666859"/>
+                  </a:lnTo>
+                  <a:lnTo>
+                    <a:pt x="716225" y="675021"/>
+                  </a:lnTo>
+                  <a:lnTo>
+                    <a:pt x="644602" y="682748"/>
+                  </a:lnTo>
+                  <a:lnTo>
+                    <a:pt x="572980" y="690064"/>
+                  </a:lnTo>
+                  <a:lnTo>
+                    <a:pt x="501357" y="696990"/>
+                  </a:lnTo>
+                  <a:lnTo>
+                    <a:pt x="429735" y="703547"/>
+                  </a:lnTo>
+                  <a:lnTo>
+                    <a:pt x="358112" y="709755"/>
+                  </a:lnTo>
+                  <a:lnTo>
+                    <a:pt x="286490" y="715633"/>
+                  </a:lnTo>
+                  <a:lnTo>
+                    <a:pt x="214867" y="721197"/>
+                  </a:lnTo>
+                  <a:lnTo>
+                    <a:pt x="143245" y="726466"/>
+                  </a:lnTo>
+                  <a:lnTo>
+                    <a:pt x="71622" y="731453"/>
+                  </a:lnTo>
+                  <a:lnTo>
+                    <a:pt x="0" y="736176"/>
                   </a:lnTo>
                 </a:path>
               </a:pathLst>
@@ -3962,312 +3962,312 @@
           </p:nvSpPr>
           <p:spPr>
             <a:xfrm>
-              <a:off x="1172049" y="4129067"/>
-              <a:ext cx="7090630" cy="1034009"/>
+              <a:off x="1172049" y="4127493"/>
+              <a:ext cx="7090630" cy="1035283"/>
             </a:xfrm>
             <a:custGeom>
               <a:avLst/>
               <a:pathLst>
-                <a:path w="7090630" h="1034009">
+                <a:path w="7090630" h="1035283">
                   <a:moveTo>
                     <a:pt x="0" y="0"/>
                   </a:moveTo>
                   <a:lnTo>
-                    <a:pt x="71622" y="18451"/>
-                  </a:lnTo>
-                  <a:lnTo>
-                    <a:pt x="143245" y="36664"/>
-                  </a:lnTo>
-                  <a:lnTo>
-                    <a:pt x="214867" y="54642"/>
-                  </a:lnTo>
-                  <a:lnTo>
-                    <a:pt x="286490" y="72387"/>
-                  </a:lnTo>
-                  <a:lnTo>
-                    <a:pt x="358112" y="89903"/>
-                  </a:lnTo>
-                  <a:lnTo>
-                    <a:pt x="429735" y="107193"/>
-                  </a:lnTo>
-                  <a:lnTo>
-                    <a:pt x="501357" y="124260"/>
-                  </a:lnTo>
-                  <a:lnTo>
-                    <a:pt x="572980" y="141106"/>
-                  </a:lnTo>
-                  <a:lnTo>
-                    <a:pt x="644602" y="157734"/>
-                  </a:lnTo>
-                  <a:lnTo>
-                    <a:pt x="716225" y="174148"/>
-                  </a:lnTo>
-                  <a:lnTo>
-                    <a:pt x="787847" y="190350"/>
-                  </a:lnTo>
-                  <a:lnTo>
-                    <a:pt x="859470" y="206342"/>
-                  </a:lnTo>
-                  <a:lnTo>
-                    <a:pt x="931092" y="222127"/>
-                  </a:lnTo>
-                  <a:lnTo>
-                    <a:pt x="1002715" y="237709"/>
-                  </a:lnTo>
-                  <a:lnTo>
-                    <a:pt x="1074337" y="253089"/>
-                  </a:lnTo>
-                  <a:lnTo>
-                    <a:pt x="1145960" y="268271"/>
-                  </a:lnTo>
-                  <a:lnTo>
-                    <a:pt x="1217582" y="283256"/>
-                  </a:lnTo>
-                  <a:lnTo>
-                    <a:pt x="1289205" y="298048"/>
-                  </a:lnTo>
-                  <a:lnTo>
-                    <a:pt x="1360827" y="312649"/>
-                  </a:lnTo>
-                  <a:lnTo>
-                    <a:pt x="1432450" y="327061"/>
-                  </a:lnTo>
-                  <a:lnTo>
-                    <a:pt x="1504073" y="341287"/>
-                  </a:lnTo>
-                  <a:lnTo>
-                    <a:pt x="1575695" y="355329"/>
-                  </a:lnTo>
-                  <a:lnTo>
-                    <a:pt x="1647318" y="369190"/>
-                  </a:lnTo>
-                  <a:lnTo>
-                    <a:pt x="1718940" y="382872"/>
-                  </a:lnTo>
-                  <a:lnTo>
-                    <a:pt x="1790563" y="396377"/>
-                  </a:lnTo>
-                  <a:lnTo>
-                    <a:pt x="1862185" y="409707"/>
-                  </a:lnTo>
-                  <a:lnTo>
-                    <a:pt x="1933808" y="422865"/>
-                  </a:lnTo>
-                  <a:lnTo>
-                    <a:pt x="2005430" y="435854"/>
-                  </a:lnTo>
-                  <a:lnTo>
-                    <a:pt x="2077053" y="448674"/>
-                  </a:lnTo>
-                  <a:lnTo>
-                    <a:pt x="2148675" y="461329"/>
-                  </a:lnTo>
-                  <a:lnTo>
-                    <a:pt x="2220298" y="473820"/>
-                  </a:lnTo>
-                  <a:lnTo>
-                    <a:pt x="2291920" y="486150"/>
-                  </a:lnTo>
-                  <a:lnTo>
-                    <a:pt x="2363543" y="498321"/>
-                  </a:lnTo>
-                  <a:lnTo>
-                    <a:pt x="2435165" y="510334"/>
-                  </a:lnTo>
-                  <a:lnTo>
-                    <a:pt x="2506788" y="522192"/>
-                  </a:lnTo>
-                  <a:lnTo>
-                    <a:pt x="2578410" y="533897"/>
-                  </a:lnTo>
-                  <a:lnTo>
-                    <a:pt x="2650033" y="545451"/>
-                  </a:lnTo>
-                  <a:lnTo>
-                    <a:pt x="2721655" y="556855"/>
-                  </a:lnTo>
-                  <a:lnTo>
-                    <a:pt x="2793278" y="568112"/>
-                  </a:lnTo>
-                  <a:lnTo>
-                    <a:pt x="2864901" y="579224"/>
-                  </a:lnTo>
-                  <a:lnTo>
-                    <a:pt x="2936523" y="590192"/>
-                  </a:lnTo>
-                  <a:lnTo>
-                    <a:pt x="3008146" y="601019"/>
-                  </a:lnTo>
-                  <a:lnTo>
-                    <a:pt x="3079768" y="611705"/>
-                  </a:lnTo>
-                  <a:lnTo>
-                    <a:pt x="3151391" y="622254"/>
-                  </a:lnTo>
-                  <a:lnTo>
-                    <a:pt x="3223013" y="632666"/>
-                  </a:lnTo>
-                  <a:lnTo>
-                    <a:pt x="3294636" y="642944"/>
-                  </a:lnTo>
-                  <a:lnTo>
-                    <a:pt x="3366258" y="653089"/>
-                  </a:lnTo>
-                  <a:lnTo>
-                    <a:pt x="3437881" y="663102"/>
-                  </a:lnTo>
-                  <a:lnTo>
-                    <a:pt x="3509503" y="672987"/>
-                  </a:lnTo>
-                  <a:lnTo>
-                    <a:pt x="3581126" y="682744"/>
-                  </a:lnTo>
-                  <a:lnTo>
-                    <a:pt x="3652748" y="692374"/>
-                  </a:lnTo>
-                  <a:lnTo>
-                    <a:pt x="3724371" y="701881"/>
-                  </a:lnTo>
-                  <a:lnTo>
-                    <a:pt x="3795993" y="711264"/>
-                  </a:lnTo>
-                  <a:lnTo>
-                    <a:pt x="3867616" y="720526"/>
-                  </a:lnTo>
-                  <a:lnTo>
-                    <a:pt x="3939238" y="729669"/>
-                  </a:lnTo>
-                  <a:lnTo>
-                    <a:pt x="4010861" y="738693"/>
-                  </a:lnTo>
-                  <a:lnTo>
-                    <a:pt x="4082483" y="747601"/>
-                  </a:lnTo>
-                  <a:lnTo>
-                    <a:pt x="4154106" y="756394"/>
-                  </a:lnTo>
-                  <a:lnTo>
-                    <a:pt x="4225729" y="765073"/>
-                  </a:lnTo>
-                  <a:lnTo>
-                    <a:pt x="4297351" y="773640"/>
-                  </a:lnTo>
-                  <a:lnTo>
-                    <a:pt x="4368974" y="782097"/>
-                  </a:lnTo>
-                  <a:lnTo>
-                    <a:pt x="4440596" y="790444"/>
-                  </a:lnTo>
-                  <a:lnTo>
-                    <a:pt x="4512219" y="798683"/>
-                  </a:lnTo>
-                  <a:lnTo>
-                    <a:pt x="4583841" y="806816"/>
-                  </a:lnTo>
-                  <a:lnTo>
-                    <a:pt x="4655464" y="814844"/>
-                  </a:lnTo>
-                  <a:lnTo>
-                    <a:pt x="4727086" y="822768"/>
-                  </a:lnTo>
-                  <a:lnTo>
-                    <a:pt x="4798709" y="830589"/>
-                  </a:lnTo>
-                  <a:lnTo>
-                    <a:pt x="4870331" y="838310"/>
-                  </a:lnTo>
-                  <a:lnTo>
-                    <a:pt x="4941954" y="845931"/>
-                  </a:lnTo>
-                  <a:lnTo>
-                    <a:pt x="5013576" y="853453"/>
-                  </a:lnTo>
-                  <a:lnTo>
-                    <a:pt x="5085199" y="860878"/>
-                  </a:lnTo>
-                  <a:lnTo>
-                    <a:pt x="5156821" y="868208"/>
-                  </a:lnTo>
-                  <a:lnTo>
-                    <a:pt x="5228444" y="875442"/>
-                  </a:lnTo>
-                  <a:lnTo>
-                    <a:pt x="5300066" y="882584"/>
-                  </a:lnTo>
-                  <a:lnTo>
-                    <a:pt x="5371689" y="889632"/>
-                  </a:lnTo>
-                  <a:lnTo>
-                    <a:pt x="5443311" y="896590"/>
-                  </a:lnTo>
-                  <a:lnTo>
-                    <a:pt x="5514934" y="903458"/>
-                  </a:lnTo>
-                  <a:lnTo>
-                    <a:pt x="5586557" y="910237"/>
-                  </a:lnTo>
-                  <a:lnTo>
-                    <a:pt x="5658179" y="916929"/>
-                  </a:lnTo>
-                  <a:lnTo>
-                    <a:pt x="5729802" y="923534"/>
-                  </a:lnTo>
-                  <a:lnTo>
-                    <a:pt x="5801424" y="930054"/>
-                  </a:lnTo>
-                  <a:lnTo>
-                    <a:pt x="5873047" y="936489"/>
-                  </a:lnTo>
-                  <a:lnTo>
-                    <a:pt x="5944669" y="942842"/>
-                  </a:lnTo>
-                  <a:lnTo>
-                    <a:pt x="6016292" y="949112"/>
-                  </a:lnTo>
-                  <a:lnTo>
-                    <a:pt x="6087914" y="955302"/>
-                  </a:lnTo>
-                  <a:lnTo>
-                    <a:pt x="6159537" y="961411"/>
-                  </a:lnTo>
-                  <a:lnTo>
-                    <a:pt x="6231159" y="967441"/>
-                  </a:lnTo>
-                  <a:lnTo>
-                    <a:pt x="6302782" y="973394"/>
-                  </a:lnTo>
-                  <a:lnTo>
-                    <a:pt x="6374404" y="979270"/>
-                  </a:lnTo>
-                  <a:lnTo>
-                    <a:pt x="6446027" y="985069"/>
-                  </a:lnTo>
-                  <a:lnTo>
-                    <a:pt x="6517649" y="990794"/>
-                  </a:lnTo>
-                  <a:lnTo>
-                    <a:pt x="6589272" y="996445"/>
-                  </a:lnTo>
-                  <a:lnTo>
-                    <a:pt x="6660894" y="1002023"/>
-                  </a:lnTo>
-                  <a:lnTo>
-                    <a:pt x="6732517" y="1007529"/>
-                  </a:lnTo>
-                  <a:lnTo>
-                    <a:pt x="6804139" y="1012963"/>
-                  </a:lnTo>
-                  <a:lnTo>
-                    <a:pt x="6875762" y="1018328"/>
-                  </a:lnTo>
-                  <a:lnTo>
-                    <a:pt x="6947385" y="1023623"/>
-                  </a:lnTo>
-                  <a:lnTo>
-                    <a:pt x="7019007" y="1028850"/>
-                  </a:lnTo>
-                  <a:lnTo>
-                    <a:pt x="7090630" y="1034009"/>
+                    <a:pt x="71622" y="18476"/>
+                  </a:lnTo>
+                  <a:lnTo>
+                    <a:pt x="143245" y="36714"/>
+                  </a:lnTo>
+                  <a:lnTo>
+                    <a:pt x="214867" y="54716"/>
+                  </a:lnTo>
+                  <a:lnTo>
+                    <a:pt x="286490" y="72486"/>
+                  </a:lnTo>
+                  <a:lnTo>
+                    <a:pt x="358112" y="90026"/>
+                  </a:lnTo>
+                  <a:lnTo>
+                    <a:pt x="429735" y="107339"/>
+                  </a:lnTo>
+                  <a:lnTo>
+                    <a:pt x="501357" y="124428"/>
+                  </a:lnTo>
+                  <a:lnTo>
+                    <a:pt x="572980" y="141297"/>
+                  </a:lnTo>
+                  <a:lnTo>
+                    <a:pt x="644602" y="157948"/>
+                  </a:lnTo>
+                  <a:lnTo>
+                    <a:pt x="716225" y="174383"/>
+                  </a:lnTo>
+                  <a:lnTo>
+                    <a:pt x="787847" y="190606"/>
+                  </a:lnTo>
+                  <a:lnTo>
+                    <a:pt x="859470" y="206620"/>
+                  </a:lnTo>
+                  <a:lnTo>
+                    <a:pt x="931092" y="222426"/>
+                  </a:lnTo>
+                  <a:lnTo>
+                    <a:pt x="1002715" y="238028"/>
+                  </a:lnTo>
+                  <a:lnTo>
+                    <a:pt x="1074337" y="253429"/>
+                  </a:lnTo>
+                  <a:lnTo>
+                    <a:pt x="1145960" y="268631"/>
+                  </a:lnTo>
+                  <a:lnTo>
+                    <a:pt x="1217582" y="283636"/>
+                  </a:lnTo>
+                  <a:lnTo>
+                    <a:pt x="1289205" y="298447"/>
+                  </a:lnTo>
+                  <a:lnTo>
+                    <a:pt x="1360827" y="313067"/>
+                  </a:lnTo>
+                  <a:lnTo>
+                    <a:pt x="1432450" y="327498"/>
+                  </a:lnTo>
+                  <a:lnTo>
+                    <a:pt x="1504073" y="341742"/>
+                  </a:lnTo>
+                  <a:lnTo>
+                    <a:pt x="1575695" y="355802"/>
+                  </a:lnTo>
+                  <a:lnTo>
+                    <a:pt x="1647318" y="369681"/>
+                  </a:lnTo>
+                  <a:lnTo>
+                    <a:pt x="1718940" y="383380"/>
+                  </a:lnTo>
+                  <a:lnTo>
+                    <a:pt x="1790563" y="396902"/>
+                  </a:lnTo>
+                  <a:lnTo>
+                    <a:pt x="1862185" y="410250"/>
+                  </a:lnTo>
+                  <a:lnTo>
+                    <a:pt x="1933808" y="423425"/>
+                  </a:lnTo>
+                  <a:lnTo>
+                    <a:pt x="2005430" y="436430"/>
+                  </a:lnTo>
+                  <a:lnTo>
+                    <a:pt x="2077053" y="449266"/>
+                  </a:lnTo>
+                  <a:lnTo>
+                    <a:pt x="2148675" y="461937"/>
+                  </a:lnTo>
+                  <a:lnTo>
+                    <a:pt x="2220298" y="474444"/>
+                  </a:lnTo>
+                  <a:lnTo>
+                    <a:pt x="2291920" y="486790"/>
+                  </a:lnTo>
+                  <a:lnTo>
+                    <a:pt x="2363543" y="498975"/>
+                  </a:lnTo>
+                  <a:lnTo>
+                    <a:pt x="2435165" y="511004"/>
+                  </a:lnTo>
+                  <a:lnTo>
+                    <a:pt x="2506788" y="522877"/>
+                  </a:lnTo>
+                  <a:lnTo>
+                    <a:pt x="2578410" y="534596"/>
+                  </a:lnTo>
+                  <a:lnTo>
+                    <a:pt x="2650033" y="546164"/>
+                  </a:lnTo>
+                  <a:lnTo>
+                    <a:pt x="2721655" y="557583"/>
+                  </a:lnTo>
+                  <a:lnTo>
+                    <a:pt x="2793278" y="568854"/>
+                  </a:lnTo>
+                  <a:lnTo>
+                    <a:pt x="2864901" y="579979"/>
+                  </a:lnTo>
+                  <a:lnTo>
+                    <a:pt x="2936523" y="590961"/>
+                  </a:lnTo>
+                  <a:lnTo>
+                    <a:pt x="3008146" y="601801"/>
+                  </a:lnTo>
+                  <a:lnTo>
+                    <a:pt x="3079768" y="612500"/>
+                  </a:lnTo>
+                  <a:lnTo>
+                    <a:pt x="3151391" y="623062"/>
+                  </a:lnTo>
+                  <a:lnTo>
+                    <a:pt x="3223013" y="633486"/>
+                  </a:lnTo>
+                  <a:lnTo>
+                    <a:pt x="3294636" y="643777"/>
+                  </a:lnTo>
+                  <a:lnTo>
+                    <a:pt x="3366258" y="653934"/>
+                  </a:lnTo>
+                  <a:lnTo>
+                    <a:pt x="3437881" y="663960"/>
+                  </a:lnTo>
+                  <a:lnTo>
+                    <a:pt x="3509503" y="673856"/>
+                  </a:lnTo>
+                  <a:lnTo>
+                    <a:pt x="3581126" y="683624"/>
+                  </a:lnTo>
+                  <a:lnTo>
+                    <a:pt x="3652748" y="693267"/>
+                  </a:lnTo>
+                  <a:lnTo>
+                    <a:pt x="3724371" y="702784"/>
+                  </a:lnTo>
+                  <a:lnTo>
+                    <a:pt x="3795993" y="712179"/>
+                  </a:lnTo>
+                  <a:lnTo>
+                    <a:pt x="3867616" y="721452"/>
+                  </a:lnTo>
+                  <a:lnTo>
+                    <a:pt x="3939238" y="730605"/>
+                  </a:lnTo>
+                  <a:lnTo>
+                    <a:pt x="4010861" y="739640"/>
+                  </a:lnTo>
+                  <a:lnTo>
+                    <a:pt x="4082483" y="748559"/>
+                  </a:lnTo>
+                  <a:lnTo>
+                    <a:pt x="4154106" y="757362"/>
+                  </a:lnTo>
+                  <a:lnTo>
+                    <a:pt x="4225729" y="766051"/>
+                  </a:lnTo>
+                  <a:lnTo>
+                    <a:pt x="4297351" y="774628"/>
+                  </a:lnTo>
+                  <a:lnTo>
+                    <a:pt x="4368974" y="783094"/>
+                  </a:lnTo>
+                  <a:lnTo>
+                    <a:pt x="4440596" y="791451"/>
+                  </a:lnTo>
+                  <a:lnTo>
+                    <a:pt x="4512219" y="799700"/>
+                  </a:lnTo>
+                  <a:lnTo>
+                    <a:pt x="4583841" y="807842"/>
+                  </a:lnTo>
+                  <a:lnTo>
+                    <a:pt x="4655464" y="815879"/>
+                  </a:lnTo>
+                  <a:lnTo>
+                    <a:pt x="4727086" y="823812"/>
+                  </a:lnTo>
+                  <a:lnTo>
+                    <a:pt x="4798709" y="831643"/>
+                  </a:lnTo>
+                  <a:lnTo>
+                    <a:pt x="4870331" y="839372"/>
+                  </a:lnTo>
+                  <a:lnTo>
+                    <a:pt x="4941954" y="847001"/>
+                  </a:lnTo>
+                  <a:lnTo>
+                    <a:pt x="5013576" y="854532"/>
+                  </a:lnTo>
+                  <a:lnTo>
+                    <a:pt x="5085199" y="861966"/>
+                  </a:lnTo>
+                  <a:lnTo>
+                    <a:pt x="5156821" y="869303"/>
+                  </a:lnTo>
+                  <a:lnTo>
+                    <a:pt x="5228444" y="876546"/>
+                  </a:lnTo>
+                  <a:lnTo>
+                    <a:pt x="5300066" y="883695"/>
+                  </a:lnTo>
+                  <a:lnTo>
+                    <a:pt x="5371689" y="890752"/>
+                  </a:lnTo>
+                  <a:lnTo>
+                    <a:pt x="5443311" y="897717"/>
+                  </a:lnTo>
+                  <a:lnTo>
+                    <a:pt x="5514934" y="904593"/>
+                  </a:lnTo>
+                  <a:lnTo>
+                    <a:pt x="5586557" y="911379"/>
+                  </a:lnTo>
+                  <a:lnTo>
+                    <a:pt x="5658179" y="918078"/>
+                  </a:lnTo>
+                  <a:lnTo>
+                    <a:pt x="5729802" y="924691"/>
+                  </a:lnTo>
+                  <a:lnTo>
+                    <a:pt x="5801424" y="931218"/>
+                  </a:lnTo>
+                  <a:lnTo>
+                    <a:pt x="5873047" y="937660"/>
+                  </a:lnTo>
+                  <a:lnTo>
+                    <a:pt x="5944669" y="944020"/>
+                  </a:lnTo>
+                  <a:lnTo>
+                    <a:pt x="6016292" y="950297"/>
+                  </a:lnTo>
+                  <a:lnTo>
+                    <a:pt x="6087914" y="956493"/>
+                  </a:lnTo>
+                  <a:lnTo>
+                    <a:pt x="6159537" y="962609"/>
+                  </a:lnTo>
+                  <a:lnTo>
+                    <a:pt x="6231159" y="968646"/>
+                  </a:lnTo>
+                  <a:lnTo>
+                    <a:pt x="6302782" y="974604"/>
+                  </a:lnTo>
+                  <a:lnTo>
+                    <a:pt x="6374404" y="980486"/>
+                  </a:lnTo>
+                  <a:lnTo>
+                    <a:pt x="6446027" y="986292"/>
+                  </a:lnTo>
+                  <a:lnTo>
+                    <a:pt x="6517649" y="992023"/>
+                  </a:lnTo>
+                  <a:lnTo>
+                    <a:pt x="6589272" y="997680"/>
+                  </a:lnTo>
+                  <a:lnTo>
+                    <a:pt x="6660894" y="1003264"/>
+                  </a:lnTo>
+                  <a:lnTo>
+                    <a:pt x="6732517" y="1008775"/>
+                  </a:lnTo>
+                  <a:lnTo>
+                    <a:pt x="6804139" y="1014215"/>
+                  </a:lnTo>
+                  <a:lnTo>
+                    <a:pt x="6875762" y="1019585"/>
+                  </a:lnTo>
+                  <a:lnTo>
+                    <a:pt x="6947385" y="1024886"/>
+                  </a:lnTo>
+                  <a:lnTo>
+                    <a:pt x="7019007" y="1030118"/>
+                  </a:lnTo>
+                  <a:lnTo>
+                    <a:pt x="7090630" y="1035283"/>
                   </a:lnTo>
                 </a:path>
               </a:pathLst>
@@ -4339,7 +4339,7 @@
           </p:nvSpPr>
           <p:spPr>
             <a:xfrm>
-              <a:off x="4164901" y="2073503"/>
+              <a:off x="4170171" y="2073503"/>
               <a:ext cx="0" cy="3649639"/>
             </a:xfrm>
             <a:custGeom>
@@ -4612,7 +4612,7 @@
           </p:nvSpPr>
           <p:spPr>
             <a:xfrm>
-              <a:off x="2284877" y="5785772"/>
+              <a:off x="2285456" y="5785772"/>
               <a:ext cx="161574" cy="80101"/>
             </a:xfrm>
             <a:prstGeom prst="rect">
@@ -4658,7 +4658,7 @@
           </p:nvSpPr>
           <p:spPr>
             <a:xfrm>
-              <a:off x="4138944" y="5785772"/>
+              <a:off x="4139043" y="5785772"/>
               <a:ext cx="62179" cy="80101"/>
             </a:xfrm>
             <a:prstGeom prst="rect">
@@ -4704,7 +4704,7 @@
           </p:nvSpPr>
           <p:spPr>
             <a:xfrm>
-              <a:off x="5912223" y="5785772"/>
+              <a:off x="5911843" y="5785772"/>
               <a:ext cx="124358" cy="80101"/>
             </a:xfrm>
             <a:prstGeom prst="rect">
@@ -4750,7 +4750,7 @@
           </p:nvSpPr>
           <p:spPr>
             <a:xfrm>
-              <a:off x="7716592" y="5785772"/>
+              <a:off x="7715733" y="5785772"/>
               <a:ext cx="124358" cy="80101"/>
             </a:xfrm>
             <a:prstGeom prst="rect">
@@ -4921,7 +4921,7 @@
                   <a:latin typeface="Helvetica"/>
                   <a:cs typeface="Helvetica"/>
                 </a:rPr>
-                <a:t>subHR per 10 % decline: 1.18 (0.50-2.76), p = 0.707  |  per IQR decline (Δ = 27.4 %): 1.57 (0.15-16.29)  |  IQR: [-12.6, 14.8] %</a:t>
+                <a:t>subHR per 10 % decline: 1.18 (0.50-2.76), p = 0.707  |  per IQR decline (Δ = 27.2 %): 1.56 (0.15-15.91)  |  IQR: [-12.3, 14.9] %</a:t>
               </a:r>
             </a:p>
           </p:txBody>
